--- a/NovaWallet_Send_and_Save_[YOUR_FULL_NAME].pptx
+++ b/NovaWallet_Send_and_Save_[YOUR_FULL_NAME].pptx
@@ -4426,7 +4426,7 @@
                 </a:solidFill>
                 <a:latin typeface="Helvetica Neue"/>
               </a:rPr>
-              <a:t>• NovaSave contribute through the same queue — wiring, not design</a:t>
+              <a:t>• StatefulShellRoute so each tab keeps its own stack</a:t>
             </a:r>
           </a:p>
           <a:p>
@@ -4442,7 +4442,7 @@
                 </a:solidFill>
                 <a:latin typeface="Helvetica Neue"/>
               </a:rPr>
-              <a:t>• Integration test on device: offline → send → restart → reconnect → one entry</a:t>
+              <a:t>• Transaction history read from the ledger, not seeded data</a:t>
             </a:r>
           </a:p>
           <a:p>
@@ -5093,7 +5093,7 @@
                 </a:solidFill>
                 <a:latin typeface="Helvetica Neue"/>
               </a:rPr>
-              <a:t>• 52 tests, analyze clean</a:t>
+              <a:t>• NovaSave: create, contribute, progress</a:t>
             </a:r>
           </a:p>
         </p:txBody>
@@ -5171,7 +5171,7 @@
                 </a:solidFill>
                 <a:latin typeface="Helvetica Neue"/>
               </a:rPr>
-              <a:t>• NovaSave contribute — queue already supports it</a:t>
+              <a:t>• Balance on Home is still a literal, not the ledger</a:t>
             </a:r>
           </a:p>
           <a:p>
@@ -5187,7 +5187,7 @@
                 </a:solidFill>
                 <a:latin typeface="Helvetica Neue"/>
               </a:rPr>
-              <a:t>• Integration test on device</a:t>
+              <a:t>• TalkBack audit (Semantics are in, unaudited)</a:t>
             </a:r>
           </a:p>
           <a:p>
@@ -6687,7 +6687,7 @@
                 </a:solidFill>
                 <a:latin typeface="Helvetica Neue"/>
               </a:rPr>
-              <a:t>52 PASSING</a:t>
+              <a:t>65 PASSING</a:t>
             </a:r>
           </a:p>
         </p:txBody>
@@ -6928,7 +6928,7 @@
                 </a:solidFill>
                 <a:latin typeface="Helvetica Neue"/>
               </a:rPr>
-              <a:t>The tests assert the property, not the implementation: they fail if the queue ever replays twice or loses an item.</a:t>
+              <a:t>The tests assert the property, not the implementation: they fail if the queue ever replays twice or loses an item. Plus an on-device integration test: offline → restart → reconnect → one ledger entry.</a:t>
             </a:r>
           </a:p>
         </p:txBody>

--- a/NovaWallet_Send_and_Save_[YOUR_FULL_NAME].pptx
+++ b/NovaWallet_Send_and_Save_[YOUR_FULL_NAME].pptx
@@ -4474,7 +4474,7 @@
                 </a:solidFill>
                 <a:latin typeface="Helvetica Neue"/>
               </a:rPr>
-              <a:t>• Balance read from the ledger rather than a literal</a:t>
+              <a:t>• A real name-enquiry call instead of the faked directory</a:t>
             </a:r>
           </a:p>
           <a:p>
@@ -5029,7 +5029,7 @@
                 </a:solidFill>
                 <a:latin typeface="Helvetica Neue"/>
               </a:rPr>
-              <a:t>• Wallet home, lazy transactions, pull-to-refresh</a:t>
+              <a:t>• Wallet home: ledger balance, lazy list, pull-to-refresh</a:t>
             </a:r>
           </a:p>
           <a:p>
@@ -5171,7 +5171,7 @@
                 </a:solidFill>
                 <a:latin typeface="Helvetica Neue"/>
               </a:rPr>
-              <a:t>• Balance on Home is still a literal, not the ledger</a:t>
+              <a:t>• Send validates against a constant, not the live balance</a:t>
             </a:r>
           </a:p>
           <a:p>
